--- a/System logów bezpieczeństwa.pptx
+++ b/System logów bezpieczeństwa.pptx
@@ -8,6 +8,7 @@
     <p:sldId id="256" r:id="rId2"/>
     <p:sldId id="257" r:id="rId3"/>
     <p:sldId id="258" r:id="rId4"/>
+    <p:sldId id="259" r:id="rId5"/>
   </p:sldIdLst>
   <p:sldSz cx="12192000" cy="6858000"/>
   <p:notesSz cx="6858000" cy="9144000"/>
@@ -106,6 +107,11 @@
       </a:defRPr>
     </a:lvl9pPr>
   </p:defaultTextStyle>
+  <p:extLst>
+    <p:ext uri="{EFAFB233-063F-42B5-8137-9DF3F51BA10A}">
+      <p15:sldGuideLst xmlns:p15="http://schemas.microsoft.com/office/powerpoint/2012/main"/>
+    </p:ext>
+  </p:extLst>
 </p:presentation>
 </file>
 
@@ -294,7 +300,7 @@
           <a:p>
             <a:fld id="{75B42E49-242E-45EB-82A5-FC71744B2E50}" type="datetimeFigureOut">
               <a:rPr lang="pl-PL" smtClean="0"/>
-              <a:t>16.03.2026</a:t>
+              <a:t>17.03.2026</a:t>
             </a:fld>
             <a:endParaRPr lang="pl-PL"/>
           </a:p>
@@ -592,7 +598,7 @@
           <a:p>
             <a:fld id="{75B42E49-242E-45EB-82A5-FC71744B2E50}" type="datetimeFigureOut">
               <a:rPr lang="pl-PL" smtClean="0"/>
-              <a:t>16.03.2026</a:t>
+              <a:t>17.03.2026</a:t>
             </a:fld>
             <a:endParaRPr lang="pl-PL"/>
           </a:p>
@@ -784,7 +790,7 @@
           <a:p>
             <a:fld id="{75B42E49-242E-45EB-82A5-FC71744B2E50}" type="datetimeFigureOut">
               <a:rPr lang="pl-PL" smtClean="0"/>
-              <a:t>16.03.2026</a:t>
+              <a:t>17.03.2026</a:t>
             </a:fld>
             <a:endParaRPr lang="pl-PL"/>
           </a:p>
@@ -1045,7 +1051,7 @@
           <a:p>
             <a:fld id="{75B42E49-242E-45EB-82A5-FC71744B2E50}" type="datetimeFigureOut">
               <a:rPr lang="pl-PL" smtClean="0"/>
-              <a:t>16.03.2026</a:t>
+              <a:t>17.03.2026</a:t>
             </a:fld>
             <a:endParaRPr lang="pl-PL"/>
           </a:p>
@@ -1469,7 +1475,7 @@
           <a:p>
             <a:fld id="{75B42E49-242E-45EB-82A5-FC71744B2E50}" type="datetimeFigureOut">
               <a:rPr lang="pl-PL" smtClean="0"/>
-              <a:t>16.03.2026</a:t>
+              <a:t>17.03.2026</a:t>
             </a:fld>
             <a:endParaRPr lang="pl-PL"/>
           </a:p>
@@ -2006,7 +2012,7 @@
           <a:p>
             <a:fld id="{75B42E49-242E-45EB-82A5-FC71744B2E50}" type="datetimeFigureOut">
               <a:rPr lang="pl-PL" smtClean="0"/>
-              <a:t>16.03.2026</a:t>
+              <a:t>17.03.2026</a:t>
             </a:fld>
             <a:endParaRPr lang="pl-PL"/>
           </a:p>
@@ -2870,7 +2876,7 @@
           <a:p>
             <a:fld id="{75B42E49-242E-45EB-82A5-FC71744B2E50}" type="datetimeFigureOut">
               <a:rPr lang="pl-PL" smtClean="0"/>
-              <a:t>16.03.2026</a:t>
+              <a:t>17.03.2026</a:t>
             </a:fld>
             <a:endParaRPr lang="pl-PL"/>
           </a:p>
@@ -3040,7 +3046,7 @@
           <a:p>
             <a:fld id="{75B42E49-242E-45EB-82A5-FC71744B2E50}" type="datetimeFigureOut">
               <a:rPr lang="pl-PL" smtClean="0"/>
-              <a:t>16.03.2026</a:t>
+              <a:t>17.03.2026</a:t>
             </a:fld>
             <a:endParaRPr lang="pl-PL"/>
           </a:p>
@@ -3224,7 +3230,7 @@
           <a:p>
             <a:fld id="{75B42E49-242E-45EB-82A5-FC71744B2E50}" type="datetimeFigureOut">
               <a:rPr lang="pl-PL" smtClean="0"/>
-              <a:t>16.03.2026</a:t>
+              <a:t>17.03.2026</a:t>
             </a:fld>
             <a:endParaRPr lang="pl-PL"/>
           </a:p>
@@ -3394,7 +3400,7 @@
           <a:p>
             <a:fld id="{75B42E49-242E-45EB-82A5-FC71744B2E50}" type="datetimeFigureOut">
               <a:rPr lang="pl-PL" smtClean="0"/>
-              <a:t>16.03.2026</a:t>
+              <a:t>17.03.2026</a:t>
             </a:fld>
             <a:endParaRPr lang="pl-PL"/>
           </a:p>
@@ -3638,7 +3644,7 @@
           <a:p>
             <a:fld id="{75B42E49-242E-45EB-82A5-FC71744B2E50}" type="datetimeFigureOut">
               <a:rPr lang="pl-PL" smtClean="0"/>
-              <a:t>16.03.2026</a:t>
+              <a:t>17.03.2026</a:t>
             </a:fld>
             <a:endParaRPr lang="pl-PL"/>
           </a:p>
@@ -3874,7 +3880,7 @@
           <a:p>
             <a:fld id="{75B42E49-242E-45EB-82A5-FC71744B2E50}" type="datetimeFigureOut">
               <a:rPr lang="pl-PL" smtClean="0"/>
-              <a:t>16.03.2026</a:t>
+              <a:t>17.03.2026</a:t>
             </a:fld>
             <a:endParaRPr lang="pl-PL"/>
           </a:p>
@@ -4340,7 +4346,7 @@
           <a:p>
             <a:fld id="{75B42E49-242E-45EB-82A5-FC71744B2E50}" type="datetimeFigureOut">
               <a:rPr lang="pl-PL" smtClean="0"/>
-              <a:t>16.03.2026</a:t>
+              <a:t>17.03.2026</a:t>
             </a:fld>
             <a:endParaRPr lang="pl-PL"/>
           </a:p>
@@ -4458,7 +4464,7 @@
           <a:p>
             <a:fld id="{75B42E49-242E-45EB-82A5-FC71744B2E50}" type="datetimeFigureOut">
               <a:rPr lang="pl-PL" smtClean="0"/>
-              <a:t>16.03.2026</a:t>
+              <a:t>17.03.2026</a:t>
             </a:fld>
             <a:endParaRPr lang="pl-PL"/>
           </a:p>
@@ -4553,7 +4559,7 @@
           <a:p>
             <a:fld id="{75B42E49-242E-45EB-82A5-FC71744B2E50}" type="datetimeFigureOut">
               <a:rPr lang="pl-PL" smtClean="0"/>
-              <a:t>16.03.2026</a:t>
+              <a:t>17.03.2026</a:t>
             </a:fld>
             <a:endParaRPr lang="pl-PL"/>
           </a:p>
@@ -4808,7 +4814,7 @@
           <a:p>
             <a:fld id="{75B42E49-242E-45EB-82A5-FC71744B2E50}" type="datetimeFigureOut">
               <a:rPr lang="pl-PL" smtClean="0"/>
-              <a:t>16.03.2026</a:t>
+              <a:t>17.03.2026</a:t>
             </a:fld>
             <a:endParaRPr lang="pl-PL"/>
           </a:p>
@@ -5108,7 +5114,7 @@
           <a:p>
             <a:fld id="{75B42E49-242E-45EB-82A5-FC71744B2E50}" type="datetimeFigureOut">
               <a:rPr lang="pl-PL" smtClean="0"/>
-              <a:t>16.03.2026</a:t>
+              <a:t>17.03.2026</a:t>
             </a:fld>
             <a:endParaRPr lang="pl-PL"/>
           </a:p>
@@ -5342,7 +5348,7 @@
           <a:p>
             <a:fld id="{75B42E49-242E-45EB-82A5-FC71744B2E50}" type="datetimeFigureOut">
               <a:rPr lang="pl-PL" smtClean="0"/>
-              <a:t>16.03.2026</a:t>
+              <a:t>17.03.2026</a:t>
             </a:fld>
             <a:endParaRPr lang="pl-PL"/>
           </a:p>
@@ -6501,6 +6507,748 @@
 </p:sld>
 </file>
 
+<file path=ppt/slides/slide4.xml><?xml version="1.0" encoding="utf-8"?>
+<p:sld xmlns:a="http://schemas.openxmlformats.org/drawingml/2006/main" xmlns:r="http://schemas.openxmlformats.org/officeDocument/2006/relationships" xmlns:p="http://schemas.openxmlformats.org/presentationml/2006/main">
+  <p:cSld>
+    <p:spTree>
+      <p:nvGrpSpPr>
+        <p:cNvPr id="1" name=""/>
+        <p:cNvGrpSpPr/>
+        <p:nvPr/>
+      </p:nvGrpSpPr>
+      <p:grpSpPr>
+        <a:xfrm>
+          <a:off x="0" y="0"/>
+          <a:ext cx="0" cy="0"/>
+          <a:chOff x="0" y="0"/>
+          <a:chExt cx="0" cy="0"/>
+        </a:xfrm>
+      </p:grpSpPr>
+      <p:sp>
+        <p:nvSpPr>
+          <p:cNvPr id="2" name="Tytuł 1"/>
+          <p:cNvSpPr>
+            <a:spLocks noGrp="1"/>
+          </p:cNvSpPr>
+          <p:nvPr>
+            <p:ph type="title"/>
+          </p:nvPr>
+        </p:nvSpPr>
+        <p:spPr>
+          <a:xfrm>
+            <a:off x="913795" y="397090"/>
+            <a:ext cx="10353762" cy="970450"/>
+          </a:xfrm>
+        </p:spPr>
+        <p:txBody>
+          <a:bodyPr/>
+          <a:lstStyle/>
+          <a:p>
+            <a:r>
+              <a:rPr lang="pl-PL" dirty="0" smtClean="0"/>
+              <a:t>Jakie zagrożenia można wykryć</a:t>
+            </a:r>
+            <a:endParaRPr lang="pl-PL" dirty="0"/>
+          </a:p>
+        </p:txBody>
+      </p:sp>
+      <p:sp>
+        <p:nvSpPr>
+          <p:cNvPr id="3" name="Symbol zastępczy zawartości 2"/>
+          <p:cNvSpPr>
+            <a:spLocks noGrp="1"/>
+          </p:cNvSpPr>
+          <p:nvPr>
+            <p:ph idx="1"/>
+          </p:nvPr>
+        </p:nvSpPr>
+        <p:spPr>
+          <a:xfrm>
+            <a:off x="913795" y="1267231"/>
+            <a:ext cx="10353762" cy="946583"/>
+          </a:xfrm>
+        </p:spPr>
+        <p:txBody>
+          <a:bodyPr/>
+          <a:lstStyle/>
+          <a:p>
+            <a:pPr marL="36900" indent="0">
+              <a:buNone/>
+            </a:pPr>
+            <a:r>
+              <a:rPr lang="pl-PL" dirty="0">
+                <a:effectLst/>
+              </a:rPr>
+              <a:t>System SIEM pomaga wykrywać szerokie spektrum zagrożeń – od ataków zewnętrznych, takich jak </a:t>
+            </a:r>
+            <a:r>
+              <a:rPr lang="pl-PL" b="1" dirty="0" err="1">
+                <a:effectLst/>
+              </a:rPr>
+              <a:t>ransomware</a:t>
+            </a:r>
+            <a:r>
+              <a:rPr lang="pl-PL" dirty="0">
+                <a:effectLst/>
+              </a:rPr>
+              <a:t>, </a:t>
+            </a:r>
+            <a:r>
+              <a:rPr lang="pl-PL" dirty="0" err="1">
+                <a:effectLst/>
+              </a:rPr>
+              <a:t>phishing</a:t>
+            </a:r>
+            <a:r>
+              <a:rPr lang="pl-PL" dirty="0">
+                <a:effectLst/>
+              </a:rPr>
+              <a:t> czy </a:t>
+            </a:r>
+            <a:r>
+              <a:rPr lang="pl-PL" dirty="0" err="1">
+                <a:effectLst/>
+              </a:rPr>
+              <a:t>DDoS</a:t>
+            </a:r>
+            <a:r>
+              <a:rPr lang="pl-PL" dirty="0">
+                <a:effectLst/>
+              </a:rPr>
+              <a:t>, po wewnętrzne naruszenia bezpieczeństwa.</a:t>
+            </a:r>
+            <a:endParaRPr lang="pl-PL" dirty="0"/>
+          </a:p>
+        </p:txBody>
+      </p:sp>
+      <p:sp>
+        <p:nvSpPr>
+          <p:cNvPr id="4" name="Tytuł 1"/>
+          <p:cNvSpPr txBox="1">
+            <a:spLocks/>
+          </p:cNvSpPr>
+          <p:nvPr/>
+        </p:nvSpPr>
+        <p:spPr>
+          <a:xfrm>
+            <a:off x="913795" y="2093498"/>
+            <a:ext cx="10353762" cy="970450"/>
+          </a:xfrm>
+          <a:prstGeom prst="rect">
+            <a:avLst/>
+          </a:prstGeom>
+          <a:effectLst>
+            <a:outerShdw blurRad="25400" dir="17880000">
+              <a:srgbClr val="000000">
+                <a:alpha val="46000"/>
+              </a:srgbClr>
+            </a:outerShdw>
+          </a:effectLst>
+        </p:spPr>
+        <p:txBody>
+          <a:bodyPr vert="horz" lIns="91440" tIns="45720" rIns="91440" bIns="45720" rtlCol="0" anchor="ctr">
+            <a:normAutofit/>
+          </a:bodyPr>
+          <a:lstStyle>
+            <a:lvl1pPr algn="ctr" defTabSz="457200" rtl="0" eaLnBrk="1" latinLnBrk="0" hangingPunct="1">
+              <a:spcBef>
+                <a:spcPct val="0"/>
+              </a:spcBef>
+              <a:buNone/>
+              <a:defRPr sz="4000" kern="1200">
+                <a:ln>
+                  <a:solidFill>
+                    <a:schemeClr val="bg1">
+                      <a:lumMod val="75000"/>
+                      <a:lumOff val="25000"/>
+                      <a:alpha val="10000"/>
+                    </a:schemeClr>
+                  </a:solidFill>
+                </a:ln>
+                <a:solidFill>
+                  <a:schemeClr val="tx2"/>
+                </a:solidFill>
+                <a:effectLst>
+                  <a:outerShdw blurRad="9525" dist="25400" dir="14640000" algn="tl" rotWithShape="0">
+                    <a:schemeClr val="bg1">
+                      <a:alpha val="30000"/>
+                    </a:schemeClr>
+                  </a:outerShdw>
+                </a:effectLst>
+                <a:latin typeface="+mj-lt"/>
+                <a:ea typeface="+mj-ea"/>
+                <a:cs typeface="Trebuchet MS"/>
+              </a:defRPr>
+            </a:lvl1pPr>
+            <a:lvl2pPr eaLnBrk="1" hangingPunct="1">
+              <a:defRPr>
+                <a:solidFill>
+                  <a:schemeClr val="tx2"/>
+                </a:solidFill>
+              </a:defRPr>
+            </a:lvl2pPr>
+            <a:lvl3pPr eaLnBrk="1" hangingPunct="1">
+              <a:defRPr>
+                <a:solidFill>
+                  <a:schemeClr val="tx2"/>
+                </a:solidFill>
+              </a:defRPr>
+            </a:lvl3pPr>
+            <a:lvl4pPr eaLnBrk="1" hangingPunct="1">
+              <a:defRPr>
+                <a:solidFill>
+                  <a:schemeClr val="tx2"/>
+                </a:solidFill>
+              </a:defRPr>
+            </a:lvl4pPr>
+            <a:lvl5pPr eaLnBrk="1" hangingPunct="1">
+              <a:defRPr>
+                <a:solidFill>
+                  <a:schemeClr val="tx2"/>
+                </a:solidFill>
+              </a:defRPr>
+            </a:lvl5pPr>
+            <a:lvl6pPr eaLnBrk="1" hangingPunct="1">
+              <a:defRPr>
+                <a:solidFill>
+                  <a:schemeClr val="tx2"/>
+                </a:solidFill>
+              </a:defRPr>
+            </a:lvl6pPr>
+            <a:lvl7pPr eaLnBrk="1" hangingPunct="1">
+              <a:defRPr>
+                <a:solidFill>
+                  <a:schemeClr val="tx2"/>
+                </a:solidFill>
+              </a:defRPr>
+            </a:lvl7pPr>
+            <a:lvl8pPr eaLnBrk="1" hangingPunct="1">
+              <a:defRPr>
+                <a:solidFill>
+                  <a:schemeClr val="tx2"/>
+                </a:solidFill>
+              </a:defRPr>
+            </a:lvl8pPr>
+            <a:lvl9pPr eaLnBrk="1" hangingPunct="1">
+              <a:defRPr>
+                <a:solidFill>
+                  <a:schemeClr val="tx2"/>
+                </a:solidFill>
+              </a:defRPr>
+            </a:lvl9pPr>
+          </a:lstStyle>
+          <a:p>
+            <a:r>
+              <a:rPr lang="pl-PL" dirty="0" smtClean="0"/>
+              <a:t>Wyzwania związane z tym systemem</a:t>
+            </a:r>
+            <a:endParaRPr lang="pl-PL" dirty="0"/>
+          </a:p>
+        </p:txBody>
+      </p:sp>
+      <p:sp>
+        <p:nvSpPr>
+          <p:cNvPr id="5" name="Symbol zastępczy zawartości 2"/>
+          <p:cNvSpPr txBox="1">
+            <a:spLocks/>
+          </p:cNvSpPr>
+          <p:nvPr/>
+        </p:nvSpPr>
+        <p:spPr>
+          <a:xfrm>
+            <a:off x="401052" y="2939772"/>
+            <a:ext cx="11534273" cy="3918228"/>
+          </a:xfrm>
+          <a:prstGeom prst="rect">
+            <a:avLst/>
+          </a:prstGeom>
+          <a:effectLst>
+            <a:outerShdw blurRad="25400" dir="17880000">
+              <a:srgbClr val="000000">
+                <a:alpha val="46000"/>
+              </a:srgbClr>
+            </a:outerShdw>
+          </a:effectLst>
+        </p:spPr>
+        <p:txBody>
+          <a:bodyPr vert="horz" lIns="91440" tIns="45720" rIns="91440" bIns="45720" rtlCol="0" anchor="t">
+            <a:normAutofit fontScale="92500" lnSpcReduction="20000"/>
+          </a:bodyPr>
+          <a:lstStyle>
+            <a:lvl1pPr marL="342900" indent="-306000" algn="l" defTabSz="457200" rtl="0" eaLnBrk="1" latinLnBrk="0" hangingPunct="1">
+              <a:spcBef>
+                <a:spcPct val="20000"/>
+              </a:spcBef>
+              <a:spcAft>
+                <a:spcPts val="600"/>
+              </a:spcAft>
+              <a:buClr>
+                <a:schemeClr val="tx2"/>
+              </a:buClr>
+              <a:buSzPct val="70000"/>
+              <a:buFont typeface="Wingdings 2" charset="2"/>
+              <a:buChar char=""/>
+              <a:defRPr sz="2000" kern="1200">
+                <a:ln>
+                  <a:solidFill>
+                    <a:schemeClr val="bg1">
+                      <a:lumMod val="75000"/>
+                      <a:lumOff val="25000"/>
+                      <a:alpha val="10000"/>
+                    </a:schemeClr>
+                  </a:solidFill>
+                </a:ln>
+                <a:solidFill>
+                  <a:schemeClr val="tx2"/>
+                </a:solidFill>
+                <a:effectLst>
+                  <a:outerShdw blurRad="9525" dist="25400" dir="14640000" algn="tl" rotWithShape="0">
+                    <a:schemeClr val="bg1">
+                      <a:alpha val="30000"/>
+                    </a:schemeClr>
+                  </a:outerShdw>
+                </a:effectLst>
+                <a:latin typeface="+mn-lt"/>
+                <a:ea typeface="+mn-ea"/>
+                <a:cs typeface="+mn-cs"/>
+              </a:defRPr>
+            </a:lvl1pPr>
+            <a:lvl2pPr marL="720000" indent="-270000" algn="l" defTabSz="457200" rtl="0" eaLnBrk="1" latinLnBrk="0" hangingPunct="1">
+              <a:spcBef>
+                <a:spcPct val="20000"/>
+              </a:spcBef>
+              <a:spcAft>
+                <a:spcPts val="600"/>
+              </a:spcAft>
+              <a:buClr>
+                <a:schemeClr val="tx2"/>
+              </a:buClr>
+              <a:buSzPct val="70000"/>
+              <a:buFont typeface="Wingdings 2" charset="2"/>
+              <a:buChar char=""/>
+              <a:defRPr sz="1800" kern="1200">
+                <a:ln>
+                  <a:solidFill>
+                    <a:schemeClr val="bg1">
+                      <a:lumMod val="75000"/>
+                      <a:lumOff val="25000"/>
+                      <a:alpha val="10000"/>
+                    </a:schemeClr>
+                  </a:solidFill>
+                </a:ln>
+                <a:solidFill>
+                  <a:schemeClr val="tx2"/>
+                </a:solidFill>
+                <a:effectLst>
+                  <a:outerShdw blurRad="9525" dist="25400" dir="14640000" algn="tl" rotWithShape="0">
+                    <a:schemeClr val="bg1">
+                      <a:alpha val="30000"/>
+                    </a:schemeClr>
+                  </a:outerShdw>
+                </a:effectLst>
+                <a:latin typeface="+mn-lt"/>
+                <a:ea typeface="+mn-ea"/>
+                <a:cs typeface="+mn-cs"/>
+              </a:defRPr>
+            </a:lvl2pPr>
+            <a:lvl3pPr marL="1026000" indent="-216000" algn="l" defTabSz="457200" rtl="0" eaLnBrk="1" latinLnBrk="0" hangingPunct="1">
+              <a:spcBef>
+                <a:spcPct val="20000"/>
+              </a:spcBef>
+              <a:spcAft>
+                <a:spcPts val="600"/>
+              </a:spcAft>
+              <a:buClr>
+                <a:schemeClr val="tx2"/>
+              </a:buClr>
+              <a:buSzPct val="70000"/>
+              <a:buFont typeface="Wingdings 2" charset="2"/>
+              <a:buChar char=""/>
+              <a:defRPr sz="1600" kern="1200">
+                <a:ln>
+                  <a:solidFill>
+                    <a:schemeClr val="bg1">
+                      <a:lumMod val="75000"/>
+                      <a:lumOff val="25000"/>
+                      <a:alpha val="10000"/>
+                    </a:schemeClr>
+                  </a:solidFill>
+                </a:ln>
+                <a:solidFill>
+                  <a:schemeClr val="tx2"/>
+                </a:solidFill>
+                <a:effectLst>
+                  <a:outerShdw blurRad="9525" dist="25400" dir="14640000" algn="tl" rotWithShape="0">
+                    <a:schemeClr val="bg1">
+                      <a:alpha val="30000"/>
+                    </a:schemeClr>
+                  </a:outerShdw>
+                </a:effectLst>
+                <a:latin typeface="+mn-lt"/>
+                <a:ea typeface="+mn-ea"/>
+                <a:cs typeface="+mn-cs"/>
+              </a:defRPr>
+            </a:lvl3pPr>
+            <a:lvl4pPr marL="1386000" indent="-216000" algn="l" defTabSz="457200" rtl="0" eaLnBrk="1" latinLnBrk="0" hangingPunct="1">
+              <a:spcBef>
+                <a:spcPct val="20000"/>
+              </a:spcBef>
+              <a:spcAft>
+                <a:spcPts val="600"/>
+              </a:spcAft>
+              <a:buClr>
+                <a:schemeClr val="tx2"/>
+              </a:buClr>
+              <a:buSzPct val="70000"/>
+              <a:buFont typeface="Wingdings 2" charset="2"/>
+              <a:buChar char=""/>
+              <a:defRPr sz="1400" kern="1200">
+                <a:ln>
+                  <a:solidFill>
+                    <a:schemeClr val="bg1">
+                      <a:lumMod val="75000"/>
+                      <a:lumOff val="25000"/>
+                      <a:alpha val="10000"/>
+                    </a:schemeClr>
+                  </a:solidFill>
+                </a:ln>
+                <a:solidFill>
+                  <a:schemeClr val="tx2"/>
+                </a:solidFill>
+                <a:effectLst>
+                  <a:outerShdw blurRad="9525" dist="25400" dir="14640000" algn="tl" rotWithShape="0">
+                    <a:schemeClr val="bg1">
+                      <a:alpha val="30000"/>
+                    </a:schemeClr>
+                  </a:outerShdw>
+                </a:effectLst>
+                <a:latin typeface="+mn-lt"/>
+                <a:ea typeface="+mn-ea"/>
+                <a:cs typeface="+mn-cs"/>
+              </a:defRPr>
+            </a:lvl4pPr>
+            <a:lvl5pPr marL="1674000" indent="-216000" algn="l" defTabSz="457200" rtl="0" eaLnBrk="1" latinLnBrk="0" hangingPunct="1">
+              <a:spcBef>
+                <a:spcPct val="20000"/>
+              </a:spcBef>
+              <a:spcAft>
+                <a:spcPts val="600"/>
+              </a:spcAft>
+              <a:buClr>
+                <a:schemeClr val="tx2"/>
+              </a:buClr>
+              <a:buSzPct val="70000"/>
+              <a:buFont typeface="Wingdings 2" charset="2"/>
+              <a:buChar char=""/>
+              <a:defRPr sz="1400" kern="1200">
+                <a:ln>
+                  <a:solidFill>
+                    <a:schemeClr val="bg1">
+                      <a:lumMod val="75000"/>
+                      <a:lumOff val="25000"/>
+                      <a:alpha val="10000"/>
+                    </a:schemeClr>
+                  </a:solidFill>
+                </a:ln>
+                <a:solidFill>
+                  <a:schemeClr val="tx2"/>
+                </a:solidFill>
+                <a:effectLst>
+                  <a:outerShdw blurRad="9525" dist="25400" dir="14640000" algn="tl" rotWithShape="0">
+                    <a:schemeClr val="bg1">
+                      <a:alpha val="30000"/>
+                    </a:schemeClr>
+                  </a:outerShdw>
+                </a:effectLst>
+                <a:latin typeface="+mn-lt"/>
+                <a:ea typeface="+mn-ea"/>
+                <a:cs typeface="+mn-cs"/>
+              </a:defRPr>
+            </a:lvl5pPr>
+            <a:lvl6pPr marL="2014600" indent="-228600" algn="l" defTabSz="457200" rtl="0" eaLnBrk="1" latinLnBrk="0" hangingPunct="1">
+              <a:spcBef>
+                <a:spcPct val="20000"/>
+              </a:spcBef>
+              <a:spcAft>
+                <a:spcPts val="600"/>
+              </a:spcAft>
+              <a:buClr>
+                <a:schemeClr val="tx2"/>
+              </a:buClr>
+              <a:buSzPct val="70000"/>
+              <a:buFont typeface="Wingdings 2" charset="2"/>
+              <a:buChar char=""/>
+              <a:defRPr sz="1400" kern="1200">
+                <a:ln>
+                  <a:solidFill>
+                    <a:schemeClr val="bg1">
+                      <a:lumMod val="75000"/>
+                      <a:lumOff val="25000"/>
+                      <a:alpha val="10000"/>
+                    </a:schemeClr>
+                  </a:solidFill>
+                </a:ln>
+                <a:solidFill>
+                  <a:schemeClr val="tx2"/>
+                </a:solidFill>
+                <a:effectLst>
+                  <a:outerShdw blurRad="9525" dist="25400" dir="14640000" algn="tl" rotWithShape="0">
+                    <a:schemeClr val="bg1">
+                      <a:alpha val="30000"/>
+                    </a:schemeClr>
+                  </a:outerShdw>
+                </a:effectLst>
+                <a:latin typeface="+mn-lt"/>
+                <a:ea typeface="+mn-ea"/>
+                <a:cs typeface="+mn-cs"/>
+              </a:defRPr>
+            </a:lvl6pPr>
+            <a:lvl7pPr marL="2401800" indent="-228600" algn="l" defTabSz="457200" rtl="0" eaLnBrk="1" latinLnBrk="0" hangingPunct="1">
+              <a:spcBef>
+                <a:spcPct val="20000"/>
+              </a:spcBef>
+              <a:spcAft>
+                <a:spcPts val="600"/>
+              </a:spcAft>
+              <a:buClr>
+                <a:schemeClr val="tx2"/>
+              </a:buClr>
+              <a:buSzPct val="70000"/>
+              <a:buFont typeface="Wingdings 2" charset="2"/>
+              <a:buChar char=""/>
+              <a:defRPr sz="1400" kern="1200">
+                <a:ln>
+                  <a:solidFill>
+                    <a:schemeClr val="bg1">
+                      <a:lumMod val="75000"/>
+                      <a:lumOff val="25000"/>
+                      <a:alpha val="10000"/>
+                    </a:schemeClr>
+                  </a:solidFill>
+                </a:ln>
+                <a:solidFill>
+                  <a:schemeClr val="tx2"/>
+                </a:solidFill>
+                <a:effectLst>
+                  <a:outerShdw blurRad="9525" dist="25400" dir="14640000" algn="tl" rotWithShape="0">
+                    <a:schemeClr val="bg1">
+                      <a:alpha val="30000"/>
+                    </a:schemeClr>
+                  </a:outerShdw>
+                </a:effectLst>
+                <a:latin typeface="+mn-lt"/>
+                <a:ea typeface="+mn-ea"/>
+                <a:cs typeface="+mn-cs"/>
+              </a:defRPr>
+            </a:lvl7pPr>
+            <a:lvl8pPr marL="2789000" indent="-228600" algn="l" defTabSz="457200" rtl="0" eaLnBrk="1" latinLnBrk="0" hangingPunct="1">
+              <a:spcBef>
+                <a:spcPct val="20000"/>
+              </a:spcBef>
+              <a:spcAft>
+                <a:spcPts val="600"/>
+              </a:spcAft>
+              <a:buClr>
+                <a:schemeClr val="tx2"/>
+              </a:buClr>
+              <a:buSzPct val="70000"/>
+              <a:buFont typeface="Wingdings 2" charset="2"/>
+              <a:buChar char=""/>
+              <a:defRPr sz="1400" kern="1200">
+                <a:ln>
+                  <a:solidFill>
+                    <a:schemeClr val="bg1">
+                      <a:lumMod val="75000"/>
+                      <a:lumOff val="25000"/>
+                      <a:alpha val="10000"/>
+                    </a:schemeClr>
+                  </a:solidFill>
+                </a:ln>
+                <a:solidFill>
+                  <a:schemeClr val="tx2"/>
+                </a:solidFill>
+                <a:effectLst>
+                  <a:outerShdw blurRad="9525" dist="25400" dir="14640000" algn="tl" rotWithShape="0">
+                    <a:schemeClr val="bg1">
+                      <a:alpha val="30000"/>
+                    </a:schemeClr>
+                  </a:outerShdw>
+                </a:effectLst>
+                <a:latin typeface="+mn-lt"/>
+                <a:ea typeface="+mn-ea"/>
+                <a:cs typeface="+mn-cs"/>
+              </a:defRPr>
+            </a:lvl8pPr>
+            <a:lvl9pPr marL="3106200" indent="-228600" algn="l" defTabSz="457200" rtl="0" eaLnBrk="1" latinLnBrk="0" hangingPunct="1">
+              <a:spcBef>
+                <a:spcPct val="20000"/>
+              </a:spcBef>
+              <a:spcAft>
+                <a:spcPts val="600"/>
+              </a:spcAft>
+              <a:buClr>
+                <a:schemeClr val="tx2"/>
+              </a:buClr>
+              <a:buSzPct val="70000"/>
+              <a:buFont typeface="Wingdings 2" charset="2"/>
+              <a:buChar char=""/>
+              <a:defRPr sz="1400" kern="1200">
+                <a:ln>
+                  <a:solidFill>
+                    <a:schemeClr val="bg1">
+                      <a:lumMod val="75000"/>
+                      <a:lumOff val="25000"/>
+                      <a:alpha val="10000"/>
+                    </a:schemeClr>
+                  </a:solidFill>
+                </a:ln>
+                <a:solidFill>
+                  <a:schemeClr val="tx2"/>
+                </a:solidFill>
+                <a:effectLst>
+                  <a:outerShdw blurRad="9525" dist="25400" dir="14640000" algn="tl" rotWithShape="0">
+                    <a:schemeClr val="bg1">
+                      <a:alpha val="30000"/>
+                    </a:schemeClr>
+                  </a:outerShdw>
+                </a:effectLst>
+                <a:latin typeface="+mn-lt"/>
+                <a:ea typeface="+mn-ea"/>
+                <a:cs typeface="+mn-cs"/>
+              </a:defRPr>
+            </a:lvl9pPr>
+          </a:lstStyle>
+          <a:p>
+            <a:r>
+              <a:rPr lang="pl-PL" b="1" dirty="0">
+                <a:effectLst/>
+              </a:rPr>
+              <a:t>Złożoność:</a:t>
+            </a:r>
+            <a:r>
+              <a:rPr lang="pl-PL" dirty="0">
+                <a:effectLst/>
+              </a:rPr>
+              <a:t> Rozwiązania te wymagają skomplikowanej konfiguracji, integracji z wieloma źródłami danych oraz stałego dostrajania reguł, co jest czasochłonne.</a:t>
+            </a:r>
+          </a:p>
+          <a:p>
+            <a:r>
+              <a:rPr lang="pl-PL" b="1" dirty="0">
+                <a:effectLst/>
+              </a:rPr>
+              <a:t>Wysokie koszty:</a:t>
+            </a:r>
+            <a:r>
+              <a:rPr lang="pl-PL" dirty="0">
+                <a:effectLst/>
+              </a:rPr>
+              <a:t> Problemem są potencjalnie wysokie koszty licencji i infrastruktury niezbędnej do przetwarzania oraz przechowywania danych.</a:t>
+            </a:r>
+          </a:p>
+          <a:p>
+            <a:r>
+              <a:rPr lang="pl-PL" b="1" dirty="0">
+                <a:effectLst/>
+              </a:rPr>
+              <a:t>Fałszywe alarmy:</a:t>
+            </a:r>
+            <a:r>
+              <a:rPr lang="pl-PL" dirty="0">
+                <a:effectLst/>
+              </a:rPr>
+              <a:t> Systemy SIEM mogą generować dużą liczbę fałszywych alarmów, co prowadzi do przeciążenia zespołu SOC i obniża jego efektywność. W branży </a:t>
+            </a:r>
+            <a:r>
+              <a:rPr lang="pl-PL" dirty="0" err="1">
+                <a:effectLst/>
+              </a:rPr>
+              <a:t>cyberbezpieczeństwa</a:t>
+            </a:r>
+            <a:r>
+              <a:rPr lang="pl-PL" dirty="0">
+                <a:effectLst/>
+              </a:rPr>
+              <a:t> 'alert </a:t>
+            </a:r>
+            <a:r>
+              <a:rPr lang="pl-PL" dirty="0" err="1">
+                <a:effectLst/>
+              </a:rPr>
+              <a:t>fatigue</a:t>
+            </a:r>
+            <a:r>
+              <a:rPr lang="pl-PL" dirty="0">
+                <a:effectLst/>
+              </a:rPr>
+              <a:t>’ jest powszechnie uznawane za jedno z głównych </a:t>
+            </a:r>
+            <a:r>
+              <a:rPr lang="pl-PL" dirty="0" err="1">
+                <a:effectLst/>
+              </a:rPr>
+              <a:t>ryzyk</a:t>
+            </a:r>
+            <a:r>
+              <a:rPr lang="pl-PL" dirty="0">
+                <a:effectLst/>
+              </a:rPr>
+              <a:t> operacyjnych. Aby uchronić przed nim zespoły, z którymi pracuję, w procesie optymalizacji zawsze zwracam szczególną uwagę na precyzję reguł korelacyjnych. Dzięki temu analitycy otrzymują wyłącznie wartościowe powiadomienia, co pozwala im utrzymać wysoką koncentrację na realnych zagrożeniach. Rozwiązaniem jest wykorzystanie AI do </a:t>
+            </a:r>
+            <a:r>
+              <a:rPr lang="pl-PL" dirty="0" err="1">
+                <a:effectLst/>
+              </a:rPr>
+              <a:t>priorytetyzacji</a:t>
+            </a:r>
+            <a:r>
+              <a:rPr lang="pl-PL" dirty="0">
+                <a:effectLst/>
+              </a:rPr>
+              <a:t> zagrożeń na podstawie analizy ryzyka, co oferują nowoczesne platformy klasy </a:t>
+            </a:r>
+            <a:r>
+              <a:rPr lang="pl-PL" dirty="0" err="1">
+                <a:effectLst/>
+              </a:rPr>
+              <a:t>Next</a:t>
+            </a:r>
+            <a:r>
+              <a:rPr lang="pl-PL" dirty="0">
+                <a:effectLst/>
+              </a:rPr>
+              <a:t>-Gen SIEM.</a:t>
+            </a:r>
+          </a:p>
+          <a:p>
+            <a:r>
+              <a:rPr lang="pl-PL" b="1" dirty="0">
+                <a:effectLst/>
+              </a:rPr>
+              <a:t>Zasoby ludzkie:</a:t>
+            </a:r>
+            <a:r>
+              <a:rPr lang="pl-PL" dirty="0">
+                <a:effectLst/>
+              </a:rPr>
+              <a:t> Skuteczna obsługa SIEM wymaga wykwalifikowanych analityków. Muszą oni potrafić zarządzać narzędziem, poprawnie interpretować jego wyniki i reagować na realne zagrożenia.</a:t>
+            </a:r>
+          </a:p>
+        </p:txBody>
+      </p:sp>
+    </p:spTree>
+    <p:extLst>
+      <p:ext uri="{BB962C8B-B14F-4D97-AF65-F5344CB8AC3E}">
+        <p14:creationId xmlns:p14="http://schemas.microsoft.com/office/powerpoint/2010/main" val="5683741"/>
+      </p:ext>
+    </p:extLst>
+  </p:cSld>
+  <p:clrMapOvr>
+    <a:masterClrMapping/>
+  </p:clrMapOvr>
+</p:sld>
+</file>
+
 <file path=ppt/theme/theme1.xml><?xml version="1.0" encoding="utf-8"?>
 <a:theme xmlns:a="http://schemas.openxmlformats.org/drawingml/2006/main" name="Slate">
   <a:themeElements>
